--- a/seminar/מצגת-סמינריון-קרת.pptx
+++ b/seminar/מצגת-סמינריון-קרת.pptx
@@ -2631,7 +2631,7 @@
                           <a:ea typeface="Arial" pitchFamily="34" charset="-122"/>
                           <a:cs typeface="Arial" pitchFamily="34" charset="-120"/>
                         </a:rPr>
-                        <a:t>בדידות, ניכור, צורך בהכרה</a:t>
+                        <a:t>אובדן ילד וגירושים (הזר); בדידות ומבוכה (המספר)</a:t>
                       </a:r>
                       <a:endParaRPr lang="en-US" sz="1150" dirty="0">
                         <a:latin typeface="Arial" charset="0"/>
@@ -3043,7 +3043,7 @@
                           <a:ea typeface="Arial" pitchFamily="34" charset="-122"/>
                           <a:cs typeface="Arial" pitchFamily="34" charset="-120"/>
                         </a:rPr>
-                        <a:t>דיבור בלתי פוסק, נוסחת שייכות, יצירה</a:t>
+                        <a:t>דיבור בלתי פוסק, מינימליזם, הסתרה, כתיבה</a:t>
                       </a:r>
                       <a:endParaRPr lang="en-US" sz="1150" dirty="0">
                         <a:latin typeface="Arial" charset="0"/>
@@ -3661,7 +3661,7 @@
                           <a:ea typeface="Arial" pitchFamily="34" charset="-122"/>
                           <a:cs typeface="Arial" pitchFamily="34" charset="-120"/>
                         </a:rPr>
-                        <a:t>אחדות מדומה, כאב משותף [להשלים]</a:t>
+                        <a:t>ויתור על העצמי, "אנחנו" מזויף, צוואר תפוס</a:t>
                       </a:r>
                       <a:endParaRPr lang="en-US" sz="1150" dirty="0">
                         <a:latin typeface="Arial" charset="0"/>
@@ -4535,7 +4535,7 @@
                 <a:ea typeface="Arial" pitchFamily="34" charset="-122"/>
                 <a:cs typeface="Arial" pitchFamily="34" charset="-120"/>
               </a:rPr>
-              <a:t>מן הסיפור המוקדם למאוחר: מן הבית הסגור אל הדיבור אל הזר – אך גם השייכות היא "לב כואב". הריקון ("סתם") והאחדות המדומה הם שני פנים של אותו מחיר.</a:t>
+              <a:t>מן הסיפור המוקדם למאוחר: מן הבית הסגור אל הדיבור עם הזר – אך גם השייכות היא "לב כואב" וצוואר תפוס. הריקון ("סתם") וההנהון המזויף הם שני פנים של אותו מחיר.</a:t>
             </a:r>
             <a:endParaRPr lang="en-US" sz="1150" dirty="0"/>
           </a:p>
@@ -5312,7 +5312,7 @@
                 <a:ea typeface="Arial" pitchFamily="34" charset="-122"/>
                 <a:cs typeface="Arial" pitchFamily="34" charset="-120"/>
               </a:rPr>
-              <a:t>פרק 3 – "מי כמונו יודע": דיבור, שותפות ויצירה</a:t>
+              <a:t>פרק 3 – "מי כמונו יודע": דיבור, אידאולוגיה, הסתרה וכתיבה</a:t>
             </a:r>
             <a:endParaRPr lang="en-US" sz="1200" dirty="0"/>
           </a:p>
@@ -11108,7 +11108,7 @@
                 <a:ea typeface="Arial" pitchFamily="34" charset="-122"/>
                 <a:cs typeface="Arial" pitchFamily="34" charset="-120"/>
               </a:rPr>
-              <a:t>מפגש בבית קפה בין המספר לבין זר אמריקאי שאינו מפסיק לדבר – וסיפור על מילים שמנסות לבנות "אנחנו".</a:t>
+              <a:t>מפגש בבית קפה בין המספר לבין סופר אמריקאי שאינו מפסיק לדבר – סיפור על מילים שבונות "אנחנו" מזויף, ועל צוואר שנתפס.</a:t>
             </a:r>
             <a:endParaRPr lang="en-US" sz="1300" dirty="0"/>
           </a:p>
@@ -11300,7 +11300,7 @@
                 <a:ea typeface="Arial" pitchFamily="34" charset="-122"/>
                 <a:cs typeface="Arial" pitchFamily="34" charset="-120"/>
               </a:rPr>
-              <a:t>אמריקאי, סופר שכתב שלושה ספרים וזכה בפרס חשוב "שלא שמעתי עליו מעולם".</a:t>
+              <a:t>סופר אמריקאי, שלושה ספרים ופרס "שלא שמעתי עליו"; כל משפט שני: "ומי כמונו יודע..."</a:t>
             </a:r>
             <a:endParaRPr lang="en-US" sz="1050" dirty="0"/>
           </a:p>
@@ -11430,7 +11430,7 @@
                 <a:ea typeface="Arial" pitchFamily="34" charset="-122"/>
                 <a:cs typeface="Arial" pitchFamily="34" charset="-120"/>
               </a:rPr>
-              <a:t>הדיבור</a:t>
+              <a:t>החיים שהתפרקו</a:t>
             </a:r>
             <a:endParaRPr lang="en-US" sz="1400" dirty="0"/>
           </a:p>
@@ -11469,7 +11469,7 @@
                 <a:ea typeface="Arial" pitchFamily="34" charset="-122"/>
                 <a:cs typeface="Arial" pitchFamily="34" charset="-120"/>
               </a:rPr>
-              <a:t>מדבר מהר, "כאילו יש לו יותר מדי דברים להגיד והוא חייב להספיק את כולם".</a:t>
+              <a:t>ילד שנהרג בתאונה, גירושים, גיור והתפקרות, מינימליזם: "שני זוגות תחתונים ועט אחד".</a:t>
             </a:r>
             <a:endParaRPr lang="en-US" sz="1050" dirty="0"/>
           </a:p>
@@ -11599,7 +11599,7 @@
                 <a:ea typeface="Arial" pitchFamily="34" charset="-122"/>
                 <a:cs typeface="Arial" pitchFamily="34" charset="-120"/>
               </a:rPr>
-              <a:t>הנוסחה</a:t>
+              <a:t>השקר</a:t>
             </a:r>
             <a:endParaRPr lang="en-US" sz="1400" dirty="0"/>
           </a:p>
@@ -11638,7 +11638,7 @@
                 <a:ea typeface="Arial" pitchFamily="34" charset="-122"/>
                 <a:cs typeface="Arial" pitchFamily="34" charset="-120"/>
               </a:rPr>
-              <a:t>כל משפט שני נפתח ב"ומי כמונו יודע..." – המאזין נעשה שותף בעל כורחו.</a:t>
+              <a:t>המספר מסתיר את עשרים זוגות התחתונים: "פחדתי שזה ירחיק בינינו".</a:t>
             </a:r>
             <a:endParaRPr lang="en-US" sz="1050" dirty="0"/>
           </a:p>
@@ -11768,7 +11768,7 @@
                 <a:ea typeface="Arial" pitchFamily="34" charset="-122"/>
                 <a:cs typeface="Arial" pitchFamily="34" charset="-120"/>
               </a:rPr>
-              <a:t>לב אחד</a:t>
+              <a:t>השקיעה</a:t>
             </a:r>
             <a:endParaRPr lang="en-US" sz="1400" dirty="0"/>
           </a:p>
@@ -11807,7 +11807,7 @@
                 <a:ea typeface="Arial" pitchFamily="34" charset="-122"/>
                 <a:cs typeface="Arial" pitchFamily="34" charset="-120"/>
               </a:rPr>
-              <a:t>"תאומים סיאמיים... חולקים לב אחד גדול וכואב שפועם כמו מטרונום ענקי".</a:t>
+              <a:t>"אתה ואני יכולים, בעזרת הכתיבה, לשמר את היופי הזה לנצח" – והצוואר מתחיל לכאוב.</a:t>
             </a:r>
             <a:endParaRPr lang="en-US" sz="1050" dirty="0"/>
           </a:p>
@@ -11937,7 +11937,7 @@
                 <a:ea typeface="Arial" pitchFamily="34" charset="-122"/>
                 <a:cs typeface="Arial" pitchFamily="34" charset="-120"/>
               </a:rPr>
-              <a:t>היצירה</a:t>
+              <a:t>הסיום</a:t>
             </a:r>
             <a:endParaRPr lang="en-US" sz="1400" dirty="0"/>
           </a:p>
@@ -11976,7 +11976,7 @@
                 <a:ea typeface="Arial" pitchFamily="34" charset="-122"/>
                 <a:cs typeface="Arial" pitchFamily="34" charset="-120"/>
               </a:rPr>
-              <a:t>"יצירה היא בסך הכול פעולת הסחה" – ואל הסיום [להשלים לפי הטקסט המלא].</a:t>
+              <a:t>"גם אני" – והסיפור הבא: "על מישהו שנתפס לו הצוואר".</a:t>
             </a:r>
             <a:endParaRPr lang="en-US" sz="1050" dirty="0"/>
           </a:p>
@@ -12176,7 +12176,7 @@
               <a:buNone/>
             </a:pPr>
             <a:r>
-              <a:rPr lang="en-US" sz="1350" i="1" dirty="0">
+              <a:rPr lang="en-US" sz="1300" i="1" dirty="0">
                 <a:solidFill>
                   <a:srgbClr val="FFFFFF"/>
                 </a:solidFill>
@@ -12184,9 +12184,9 @@
                 <a:ea typeface="Arial" pitchFamily="34" charset="-122"/>
                 <a:cs typeface="Arial" pitchFamily="34" charset="-120"/>
               </a:rPr>
-              <a:t>"זה גרם לי להרגיש כאילו אנחנו ישות אחת, תאומים סיאמיים שאמנם יכולים לנופף עצמאית, כל אחד בזרועותיו שלו, אבל חולקים לב אחד גדול וכואב..."</a:t>
-            </a:r>
-            <a:endParaRPr lang="en-US" sz="1350" dirty="0"/>
+              <a:t>"אני ואתה, אנחנו בני מזל... אתה ואני יכולים, בעזרת הכתיבה, לשמר את היופי הזה לנצח." זאת באמת היתה שקיעה יפה, אבל הצוואר שלי התחיל לכאוב.</a:t>
+            </a:r>
+            <a:endParaRPr lang="en-US" sz="1300" dirty="0"/>
           </a:p>
         </p:txBody>
       </p:sp>
@@ -12223,7 +12223,7 @@
                 <a:ea typeface="Arial" pitchFamily="34" charset="-122"/>
                 <a:cs typeface="Arial" pitchFamily="34" charset="-120"/>
               </a:rPr>
-              <a:t>"ומי כמונו יודע, שיצירה היא בסך הכול פעולת הסחה..."</a:t>
+              <a:t>"כבר אז ידעתי שהסיפור הבא שלי הולך להיות על מישהו שנתפס לו הצוואר."</a:t>
             </a:r>
             <a:endParaRPr lang="en-US" sz="1300" dirty="0"/>
           </a:p>
@@ -12353,7 +12353,7 @@
                 <a:ea typeface="Arial" pitchFamily="34" charset="-122"/>
                 <a:cs typeface="Arial" pitchFamily="34" charset="-120"/>
               </a:rPr>
-              <a:t>דיבור בלתי פוסק = ויסות רגשי</a:t>
+              <a:t>דיבור ו"ומי כמונו יודע" = חיפוש שייכות</a:t>
             </a:r>
             <a:endParaRPr lang="en-US" sz="1250" dirty="0"/>
           </a:p>
@@ -12392,7 +12392,7 @@
                 <a:ea typeface="Arial" pitchFamily="34" charset="-122"/>
                 <a:cs typeface="Arial" pitchFamily="34" charset="-120"/>
               </a:rPr>
-              <a:t>הדיבור הכפוי הוא סימן למצוקה וגם דרך לשלוט בה – התמודדות ממוקדת-רגש.</a:t>
+              <a:t>הנוסחה החוזרת בונה "אנחנו" עם זר – ויסות רגשי וחיפוש תמיכה (Lazarus &amp; Folkman, 1984).</a:t>
             </a:r>
             <a:endParaRPr lang="en-US" sz="1050" dirty="0"/>
           </a:p>
@@ -12522,7 +12522,7 @@
                 <a:ea typeface="Arial" pitchFamily="34" charset="-122"/>
                 <a:cs typeface="Arial" pitchFamily="34" charset="-120"/>
               </a:rPr>
-              <a:t>"ומי כמונו יודע" = חיפוש שייכות</a:t>
+              <a:t>מינימליזם ואמונות = בנייה מחדש של החיים</a:t>
             </a:r>
             <a:endParaRPr lang="en-US" sz="1250" dirty="0"/>
           </a:p>
@@ -12561,7 +12561,7 @@
                 <a:ea typeface="Arial" pitchFamily="34" charset="-122"/>
                 <a:cs typeface="Arial" pitchFamily="34" charset="-120"/>
               </a:rPr>
-              <a:t>הנוסחה החוזרת בונה "אנחנו" עם זר; תמיכה חברתית שנכפית על המאזין.</a:t>
+              <a:t>אחרי מות הילד והגירושים: גיור, התפקרות, "עט אחד". פתרון לכאורה – הימנעות למעשה (Rubin, 1999).</a:t>
             </a:r>
             <a:endParaRPr lang="en-US" sz="1050" dirty="0"/>
           </a:p>
@@ -12691,7 +12691,7 @@
                 <a:ea typeface="Arial" pitchFamily="34" charset="-122"/>
                 <a:cs typeface="Arial" pitchFamily="34" charset="-120"/>
               </a:rPr>
-              <a:t>תאומים סיאמיים = אמפתיה</a:t>
+              <a:t>הסתרה והנהון = שמירה על הקשר</a:t>
             </a:r>
             <a:endParaRPr lang="en-US" sz="1250" dirty="0"/>
           </a:p>
@@ -12730,7 +12730,7 @@
                 <a:ea typeface="Arial" pitchFamily="34" charset="-122"/>
                 <a:cs typeface="Arial" pitchFamily="34" charset="-120"/>
               </a:rPr>
-              <a:t>דימוי גופני-פנטסטי אופייני לקרת: כאב שנחלק בין שניים נעשה נסבל – ומחייב.</a:t>
+              <a:t>המספר משקר על התחתונים ומסתובב "מתוך נימוס" – ומשלם בגוף: הצוואר.</a:t>
             </a:r>
             <a:endParaRPr lang="en-US" sz="1050" dirty="0"/>
           </a:p>
@@ -12860,7 +12860,7 @@
                 <a:ea typeface="Arial" pitchFamily="34" charset="-122"/>
                 <a:cs typeface="Arial" pitchFamily="34" charset="-120"/>
               </a:rPr>
-              <a:t>יצירה = הסחת דעת</a:t>
+              <a:t>כתיבה = הסחה או שימור?</a:t>
             </a:r>
             <a:endParaRPr lang="en-US" sz="1250" dirty="0"/>
           </a:p>
@@ -12899,7 +12899,7 @@
                 <a:ea typeface="Arial" pitchFamily="34" charset="-122"/>
                 <a:cs typeface="Arial" pitchFamily="34" charset="-120"/>
               </a:rPr>
-              <a:t>עמדה מטא-פואטית: הכתיבה עצמה כדרך התמודדות עם מציאות קשה (קצמן, 2005; טאוב, 1997).</a:t>
+              <a:t>הזר: לשמר את היופי לנצח. המספר: לכתוב על הצוואר – ההומור והבנאלי כהתמודדות כנה (Schwartz, 2018).</a:t>
             </a:r>
             <a:endParaRPr lang="en-US" sz="1050" dirty="0"/>
           </a:p>

--- a/seminar/מצגת-סמינריון-קרת.pptx
+++ b/seminar/מצגת-סמינריון-קרת.pptx
@@ -5777,8 +5777,8 @@
         </p:nvSpPr>
         <p:spPr>
           <a:xfrm>
-            <a:off x="457200" y="1097280"/>
-            <a:ext cx="8229600" cy="1920240"/>
+            <a:off x="457200" y="1051560"/>
+            <a:ext cx="8229600" cy="1600200"/>
           </a:xfrm>
           <a:prstGeom prst="rect">
             <a:avLst/>
@@ -5797,7 +5797,7 @@
               <a:buNone/>
             </a:pPr>
             <a:r>
-              <a:rPr lang="en-US" sz="1100" dirty="0">
+              <a:rPr lang="en-US" sz="1050" dirty="0">
                 <a:solidFill>
                   <a:srgbClr val="1B2A41"/>
                 </a:solidFill>
@@ -5805,9 +5805,9 @@
                 <a:ea typeface="Arial" pitchFamily="34" charset="-122"/>
                 <a:cs typeface="Arial" pitchFamily="34" charset="-120"/>
               </a:rPr>
-              <a:t>טאוב, ג' (1997). המרד השפוף: על תרבות צעירה בישראל. הקיבוץ המאוחד.</a:t>
-            </a:r>
-            <a:endParaRPr lang="en-US" sz="1100" dirty="0"/>
+              <a:t>כהן, ד' (2015). בשני צירים שונים: תהליך האבל והתקשורת של הורים ואחים שכולים לאחר אבדן ילד בוגר. מפגש לעבודה חינוכית-סוציאלית, כג(41).</a:t>
+            </a:r>
+            <a:endParaRPr lang="en-US" sz="1050" dirty="0"/>
           </a:p>
           <a:p>
             <a:pPr algn="r" indent="0" marL="0">
@@ -5817,7 +5817,7 @@
               <a:buNone/>
             </a:pPr>
             <a:r>
-              <a:rPr lang="en-US" sz="1100" dirty="0">
+              <a:rPr lang="en-US" sz="1050" dirty="0">
                 <a:solidFill>
                   <a:srgbClr val="1B2A41"/>
                 </a:solidFill>
@@ -5825,9 +5825,9 @@
                 <a:ea typeface="Arial" pitchFamily="34" charset="-122"/>
                 <a:cs typeface="Arial" pitchFamily="34" charset="-120"/>
               </a:rPr>
-              <a:t>מנדלסון-מעוז, ע' (1998). סיטואציות קיצוניות, זוועתיות וגרוטסקיות ביצירותיהם של קסטל-בלום וקרת. דפים למחקר בספרות, 11, 269–295.</a:t>
-            </a:r>
-            <a:endParaRPr lang="en-US" sz="1100" dirty="0"/>
+              <a:t>קצמן, ר' (2005). געגועים למיתוס: אישיות, אתיקה ואידאולוגיה במיתופואסיס הפוסטמודרני של אתגר קרת. מכאן, ד, 20–41.</a:t>
+            </a:r>
+            <a:endParaRPr lang="en-US" sz="1050" dirty="0"/>
           </a:p>
           <a:p>
             <a:pPr algn="r" indent="0" marL="0">
@@ -5837,7 +5837,7 @@
               <a:buNone/>
             </a:pPr>
             <a:r>
-              <a:rPr lang="en-US" sz="1100" dirty="0">
+              <a:rPr lang="en-US" sz="1050" dirty="0">
                 <a:solidFill>
                   <a:srgbClr val="1B2A41"/>
                 </a:solidFill>
@@ -5845,9 +5845,9 @@
                 <a:ea typeface="Arial" pitchFamily="34" charset="-122"/>
                 <a:cs typeface="Arial" pitchFamily="34" charset="-120"/>
               </a:rPr>
-              <a:t>קצמן, ר' (2005). געגועים למיתוס: אישיות, אתיקה ואידיאולוגיה במיתופואסיס הפוסטמודרני של אתגר קרת. מכאן, ד, 20–41.</a:t>
-            </a:r>
-            <a:endParaRPr lang="en-US" sz="1100" dirty="0"/>
+              <a:t>קרת, א' (1994). האנשים החלולים. בתוך געגועי לקיסינג'ר. זמורה-ביתן.</a:t>
+            </a:r>
+            <a:endParaRPr lang="en-US" sz="1050" dirty="0"/>
           </a:p>
           <a:p>
             <a:pPr algn="r" indent="0" marL="0">
@@ -5857,7 +5857,7 @@
               <a:buNone/>
             </a:pPr>
             <a:r>
-              <a:rPr lang="en-US" sz="1100" dirty="0">
+              <a:rPr lang="en-US" sz="1050" dirty="0">
                 <a:solidFill>
                   <a:srgbClr val="1B2A41"/>
                 </a:solidFill>
@@ -5865,29 +5865,9 @@
                 <a:ea typeface="Arial" pitchFamily="34" charset="-122"/>
                 <a:cs typeface="Arial" pitchFamily="34" charset="-120"/>
               </a:rPr>
-              <a:t>קרת, א' (1994). האנשים החלולים. בתוך געגועי לקיסינג'ר. זמורה-ביתן.</a:t>
-            </a:r>
-            <a:endParaRPr lang="en-US" sz="1100" dirty="0"/>
-          </a:p>
-          <a:p>
-            <a:pPr algn="r" indent="0" marL="0">
-              <a:spcAft>
-                <a:spcPts val="600"/>
-              </a:spcAft>
-              <a:buNone/>
-            </a:pPr>
-            <a:r>
-              <a:rPr lang="en-US" sz="1100" dirty="0">
-                <a:solidFill>
-                  <a:srgbClr val="1B2A41"/>
-                </a:solidFill>
-                <a:latin typeface="Arial" pitchFamily="34" charset="0"/>
-                <a:ea typeface="Arial" pitchFamily="34" charset="-122"/>
-                <a:cs typeface="Arial" pitchFamily="34" charset="-120"/>
-              </a:rPr>
               <a:t>קרת, א' (2024). מי כמונו יודע. בתוך אוטוקורקט. כנרת, זמורה-ביתן, דביר.</a:t>
             </a:r>
-            <a:endParaRPr lang="en-US" sz="1100" dirty="0"/>
+            <a:endParaRPr lang="en-US" sz="1050" dirty="0"/>
           </a:p>
         </p:txBody>
       </p:sp>
@@ -5899,7 +5879,7 @@
         </p:nvSpPr>
         <p:spPr>
           <a:xfrm>
-            <a:off x="457200" y="3063240"/>
+            <a:off x="457200" y="2697480"/>
             <a:ext cx="8229600" cy="0"/>
           </a:xfrm>
           <a:prstGeom prst="line">
@@ -5922,8 +5902,8 @@
         </p:nvSpPr>
         <p:spPr>
           <a:xfrm>
-            <a:off x="457200" y="3154680"/>
-            <a:ext cx="8229600" cy="1508760"/>
+            <a:off x="457200" y="2788920"/>
+            <a:ext cx="8229600" cy="1874520"/>
           </a:xfrm>
           <a:prstGeom prst="rect">
             <a:avLst/>
@@ -5942,7 +5922,7 @@
               <a:buNone/>
             </a:pPr>
             <a:r>
-              <a:rPr lang="en-US" sz="1100" dirty="0">
+              <a:rPr lang="en-US" sz="1050" dirty="0">
                 <a:solidFill>
                   <a:srgbClr val="1B2A41"/>
                 </a:solidFill>
@@ -5950,9 +5930,9 @@
                 <a:ea typeface="Arial" pitchFamily="34" charset="-122"/>
                 <a:cs typeface="Arial" pitchFamily="34" charset="-120"/>
               </a:rPr>
-              <a:t>Lazarus, R. S., &amp; Folkman, S. (1984). Stress, appraisal, and coping. Springer.</a:t>
-            </a:r>
-            <a:endParaRPr lang="en-US" sz="1100" dirty="0"/>
+              <a:t>Abramovich, D. (2019). Israeli Holocaust memory in a short story by Etgar Keret. Australian Journal of Jewish Studies, 32, 21–33.</a:t>
+            </a:r>
+            <a:endParaRPr lang="en-US" sz="1050" dirty="0"/>
           </a:p>
           <a:p>
             <a:pPr algn="l" indent="0" marL="0">
@@ -5962,7 +5942,7 @@
               <a:buNone/>
             </a:pPr>
             <a:r>
-              <a:rPr lang="en-US" sz="1100" dirty="0">
+              <a:rPr lang="en-US" sz="1050" dirty="0">
                 <a:solidFill>
                   <a:srgbClr val="1B2A41"/>
                 </a:solidFill>
@@ -5970,9 +5950,9 @@
                 <a:ea typeface="Arial" pitchFamily="34" charset="-122"/>
                 <a:cs typeface="Arial" pitchFamily="34" charset="-120"/>
               </a:rPr>
-              <a:t>Omer-Sherman, R. (2020). "To extract from it some sort of beautiful thing": The Holocaust in the families and fiction of Nava Semel and Etgar Keret. Humanities, 9(4), 137. https://doi.org/10.3390/h9040137</a:t>
-            </a:r>
-            <a:endParaRPr lang="en-US" sz="1100" dirty="0"/>
+              <a:t>Mendelson-Maoz, A. (2018). Keret's "living-dead" and the sacrifice of Israeli masculinity. BGU Review: A Journal of Israeli Culture, Winter 2018.</a:t>
+            </a:r>
+            <a:endParaRPr lang="en-US" sz="1050" dirty="0"/>
           </a:p>
           <a:p>
             <a:pPr algn="l" indent="0" marL="0">
@@ -5982,7 +5962,7 @@
               <a:buNone/>
             </a:pPr>
             <a:r>
-              <a:rPr lang="en-US" sz="1100" dirty="0">
+              <a:rPr lang="en-US" sz="1050" dirty="0">
                 <a:solidFill>
                   <a:srgbClr val="1B2A41"/>
                 </a:solidFill>
@@ -5990,9 +5970,29 @@
                 <a:ea typeface="Arial" pitchFamily="34" charset="-122"/>
                 <a:cs typeface="Arial" pitchFamily="34" charset="-120"/>
               </a:rPr>
-              <a:t>Rubin, S. S. (1999). The two-track model of bereavement: Overview, retrospect, and prospect. Death Studies, 23(8), 681–714.</a:t>
-            </a:r>
-            <a:endParaRPr lang="en-US" sz="1100" dirty="0"/>
+              <a:t>Omer-Sherman, R. (2020). "To extract from it some sort of beautiful thing": The Holocaust in the families and fiction of Nava Semel and Etgar Keret. Humanities, 9(4), 137. https://doi.org/10.3390/h9040137</a:t>
+            </a:r>
+            <a:endParaRPr lang="en-US" sz="1050" dirty="0"/>
+          </a:p>
+          <a:p>
+            <a:pPr algn="l" indent="0" marL="0">
+              <a:spcAft>
+                <a:spcPts val="600"/>
+              </a:spcAft>
+              <a:buNone/>
+            </a:pPr>
+            <a:r>
+              <a:rPr lang="en-US" sz="1050" dirty="0">
+                <a:solidFill>
+                  <a:srgbClr val="1B2A41"/>
+                </a:solidFill>
+                <a:latin typeface="Arial" pitchFamily="34" charset="0"/>
+                <a:ea typeface="Arial" pitchFamily="34" charset="-122"/>
+                <a:cs typeface="Arial" pitchFamily="34" charset="-120"/>
+              </a:rPr>
+              <a:t>Schwartz, Y. (2018). Stam: The unbearable lightness of banality, or on the nature of Etgar Keret's humor. BGU Review: A Journal of Israeli Culture, Winter 2018.</a:t>
+            </a:r>
+            <a:endParaRPr lang="en-US" sz="1050" dirty="0"/>
           </a:p>
         </p:txBody>
       </p:sp>

--- a/seminar/מצגת-סמינריון-קרת.pptx
+++ b/seminar/מצגת-סמינריון-קרת.pptx
@@ -4366,7 +4366,7 @@
                 <a:ea typeface="Arial" pitchFamily="34" charset="-122"/>
                 <a:cs typeface="Arial" pitchFamily="34" charset="-120"/>
               </a:rPr>
-              <a:t>לחישת האב ונוסחת האמריקאי משנות את משמעות המציאות, לא את המציאות. הפנטזיה של קרת היא כלי הישרדות (מנדלסון-מעוז; קצמן).</a:t>
+              <a:t>לחישת האב ונוסחת האמריקאי משנות את משמעות המציאות, לא את המציאות. המיתוס של קרת: לחיות את הבעיה בלי לפתור אותה (כצמן, 2005).</a:t>
             </a:r>
             <a:endParaRPr lang="en-US" sz="1150" dirty="0"/>
           </a:p>
@@ -5805,7 +5805,7 @@
                 <a:ea typeface="Arial" pitchFamily="34" charset="-122"/>
                 <a:cs typeface="Arial" pitchFamily="34" charset="-120"/>
               </a:rPr>
-              <a:t>כהן, ד' (2015). בשני צירים שונים: תהליך האבל והתקשורת של הורים ואחים שכולים לאחר אבדן ילד בוגר. מפגש לעבודה חינוכית-סוציאלית, כג(41).</a:t>
+              <a:t>כהן, ד' (2015). בשני צירים שונים: תהליך האבל והתקשורת של הורים ואחים שכולים לאחר אבדן ילד בוגר. מפגש לעבודה חינוכית-סוציאלית, כג(41), 97-130.</a:t>
             </a:r>
             <a:endParaRPr lang="en-US" sz="1050" dirty="0"/>
           </a:p>
@@ -5825,7 +5825,7 @@
                 <a:ea typeface="Arial" pitchFamily="34" charset="-122"/>
                 <a:cs typeface="Arial" pitchFamily="34" charset="-120"/>
               </a:rPr>
-              <a:t>קצמן, ר' (2005). געגועים למיתוס: אישיות, אתיקה ואידאולוגיה במיתופואסיס הפוסטמודרני של אתגר קרת. מכאן, ד, 20–41.</a:t>
+              <a:t>כצמן, ר' (2005). געגועים למיתוס: אישיות, אתיקה ואידיאולוגיה במיתופואסיס הפוסטמודרני של אתגר קרת. מכאן, ד, 20-41.</a:t>
             </a:r>
             <a:endParaRPr lang="en-US" sz="1050" dirty="0"/>
           </a:p>
@@ -5990,7 +5990,7 @@
                 <a:ea typeface="Arial" pitchFamily="34" charset="-122"/>
                 <a:cs typeface="Arial" pitchFamily="34" charset="-120"/>
               </a:rPr>
-              <a:t>Schwartz, Y. (2018). Stam: The unbearable lightness of banality, or on the nature of Etgar Keret's humor. BGU Review: A Journal of Israeli Culture, Winter 2018.</a:t>
+              <a:t>Schwartz, Y. (2018). "A story or a bullet between the eyes": Etgar Keret: Repetitiveness, morality, and postmodernism. BGU Review: A Journal of Israeli Culture, Winter 2018, 1-24.</a:t>
             </a:r>
             <a:endParaRPr lang="en-US" sz="1050" dirty="0"/>
           </a:p>
@@ -8955,7 +8955,7 @@
                 <a:ea typeface="Arial" pitchFamily="34" charset="-122"/>
                 <a:cs typeface="Arial" pitchFamily="34" charset="-120"/>
               </a:rPr>
-              <a:t>סיטואציות קיצוניות שהדמויות מגיבות להן בשגרה (מנדלסון-מעוז, 1998); בניית עולם פרטי עם חוקים משלו (קצמן, 2005); נסיגה מן הציבורי אל האינטימי (טאוב, 1997).</a:t>
+              <a:t>מיתוס כ"הרמוניה ללא סדר": לחיות בעיה בלי לפתור אותה (כצמן, 2005); חזרה מכנית ומוטציה נרטיבית (Schwartz, 2018); הגבריות החלשה של האבות (Mendelson-Maoz, 2018).</a:t>
             </a:r>
             <a:endParaRPr lang="en-US" sz="1150" dirty="0"/>
           </a:p>
@@ -10589,7 +10589,7 @@
                 <a:ea typeface="Arial" pitchFamily="34" charset="-122"/>
                 <a:cs typeface="Arial" pitchFamily="34" charset="-120"/>
               </a:rPr>
-              <a:t>האב מרוקן את האיום מגוף וממשמעות. הגרוטסקה כהגנה (מנדלסון-מעוז, 1998).</a:t>
+              <a:t>"רטוריקת הסתמיות של אבא": מרגיעה את הגוף, אבל דווקא הקול החוזר מפחיד (כצמן, 2005).</a:t>
             </a:r>
             <a:endParaRPr lang="en-US" sz="1050" dirty="0"/>
           </a:p>
@@ -10927,7 +10927,7 @@
                 <a:ea typeface="Arial" pitchFamily="34" charset="-122"/>
                 <a:cs typeface="Arial" pitchFamily="34" charset="-120"/>
               </a:rPr>
-              <a:t>שתיקה על הקבר, "סתם" – מי שחי בין קולות חלולים נעשה חלול (Rubin, 1999; Schwartz, 2018).</a:t>
+              <a:t>שתיקה על הקבר, "סתם" – הקול הגנוב: מי שחוזר על קולות חלולים נעשה חלול (כצמן, 2005; Rubin, 1999).</a:t>
             </a:r>
             <a:endParaRPr lang="en-US" sz="1050" dirty="0"/>
           </a:p>
@@ -12899,7 +12899,7 @@
                 <a:ea typeface="Arial" pitchFamily="34" charset="-122"/>
                 <a:cs typeface="Arial" pitchFamily="34" charset="-120"/>
               </a:rPr>
-              <a:t>הזר: לשמר את היופי לנצח. המספר: לכתוב על הצוואר – ההומור והבנאלי כהתמודדות כנה (Schwartz, 2018).</a:t>
+              <a:t>הזר: לשמר את היופי לנצח. המספר: לכתוב על הצוואר – המוטציה הקטנה שעוצרת את לולאת החזרות (Schwartz, 2018).</a:t>
             </a:r>
             <a:endParaRPr lang="en-US" sz="1050" dirty="0"/>
           </a:p>

--- a/seminar/מצגת-סמינריון-קרת.pptx
+++ b/seminar/מצגת-סמינריון-קרת.pptx
@@ -2034,14 +2034,65 @@
       </p:grpSpPr>
       <p:sp>
         <p:nvSpPr>
-          <p:cNvPr id="2" name="Text 0"/>
+          <p:cNvPr id="2" name="Shape 0"/>
+          <p:cNvSpPr/>
+          <p:nvPr/>
+        </p:nvSpPr>
+        <p:spPr>
+          <a:xfrm>
+            <a:off x="6629400" y="274320"/>
+            <a:ext cx="2057400" cy="1280160"/>
+          </a:xfrm>
+          <a:prstGeom prst="roundRect">
+            <a:avLst>
+              <a:gd name="adj" fmla="val 7143"/>
+            </a:avLst>
+          </a:prstGeom>
+          <a:solidFill>
+            <a:srgbClr val="FFFFFF"/>
+          </a:solidFill>
+          <a:ln w="12700">
+            <a:solidFill>
+              <a:srgbClr val="FFFFFF"/>
+            </a:solidFill>
+            <a:prstDash val="solid"/>
+          </a:ln>
+        </p:spPr>
+      </p:sp>
+      <p:pic>
+        <p:nvPicPr>
+          <p:cNvPr id="3" name="Image 0" descr="/home/user/clickwriting-landing/seminar/logo-college.png">    </p:cNvPr>
+          <p:cNvPicPr>
+            <a:picLocks noChangeAspect="1"/>
+          </p:cNvPicPr>
+          <p:nvPr/>
+        </p:nvPicPr>
+        <p:blipFill>
+          <a:blip r:embed="rId1"/>
+          <a:stretch>
+            <a:fillRect/>
+          </a:stretch>
+        </p:blipFill>
+        <p:spPr>
+          <a:xfrm>
+            <a:off x="6766560" y="347472"/>
+            <a:ext cx="1783080" cy="1115568"/>
+          </a:xfrm>
+          <a:prstGeom prst="rect">
+            <a:avLst/>
+          </a:prstGeom>
+        </p:spPr>
+      </p:pic>
+      <p:sp>
+        <p:nvSpPr>
+          <p:cNvPr id="4" name="Text 1"/>
           <p:cNvSpPr txBox="1"/>
           <p:nvPr/>
         </p:nvSpPr>
         <p:spPr>
           <a:xfrm>
             <a:off x="548640" y="365760"/>
-            <a:ext cx="8046720" cy="365760"/>
+            <a:ext cx="5852160" cy="365760"/>
           </a:xfrm>
           <a:prstGeom prst="rect">
             <a:avLst/>
@@ -2073,14 +2124,14 @@
       </p:sp>
       <p:sp>
         <p:nvSpPr>
-          <p:cNvPr id="3" name="Text 1"/>
+          <p:cNvPr id="5" name="Text 2"/>
           <p:cNvSpPr txBox="1"/>
           <p:nvPr/>
         </p:nvSpPr>
         <p:spPr>
           <a:xfrm>
             <a:off x="548640" y="731520"/>
-            <a:ext cx="8046720" cy="365760"/>
+            <a:ext cx="5852160" cy="365760"/>
           </a:xfrm>
           <a:prstGeom prst="rect">
             <a:avLst/>
@@ -2112,7 +2163,7 @@
       </p:sp>
       <p:sp>
         <p:nvSpPr>
-          <p:cNvPr id="4" name="Text 2"/>
+          <p:cNvPr id="6" name="Text 3"/>
           <p:cNvSpPr txBox="1"/>
           <p:nvPr/>
         </p:nvSpPr>
@@ -2151,7 +2202,7 @@
       </p:sp>
       <p:sp>
         <p:nvSpPr>
-          <p:cNvPr id="5" name="Text 3"/>
+          <p:cNvPr id="7" name="Text 4"/>
           <p:cNvSpPr txBox="1"/>
           <p:nvPr/>
         </p:nvSpPr>
@@ -2190,7 +2241,7 @@
       </p:sp>
       <p:sp>
         <p:nvSpPr>
-          <p:cNvPr id="6" name="Text 4"/>
+          <p:cNvPr id="8" name="Text 5"/>
           <p:cNvSpPr txBox="1"/>
           <p:nvPr/>
         </p:nvSpPr>
@@ -2229,7 +2280,7 @@
       </p:sp>
       <p:sp>
         <p:nvSpPr>
-          <p:cNvPr id="7" name="Shape 5"/>
+          <p:cNvPr id="9" name="Shape 6"/>
           <p:cNvSpPr/>
           <p:nvPr/>
         </p:nvSpPr>
@@ -2256,7 +2307,7 @@
       </p:sp>
       <p:sp>
         <p:nvSpPr>
-          <p:cNvPr id="8" name="Text 6"/>
+          <p:cNvPr id="10" name="Text 7"/>
           <p:cNvSpPr txBox="1"/>
           <p:nvPr/>
         </p:nvSpPr>
